--- a/atelier/atelier-x03-project-flyer.pptx
+++ b/atelier/atelier-x03-project-flyer.pptx
@@ -3140,7 +3140,7 @@
         </p:nvSpPr>
         <p:spPr>
           <a:xfrm>
-            <a:off x="857250" y="13639800"/>
+            <a:off x="857250" y="13350180"/>
             <a:ext cx="14478000" cy="9525"/>
           </a:xfrm>
           <a:prstGeom prst="rect">
@@ -3184,7 +3184,7 @@
         </p:nvSpPr>
         <p:spPr>
           <a:xfrm>
-            <a:off x="857250" y="14582775"/>
+            <a:off x="857250" y="14246275"/>
             <a:ext cx="14478000" cy="9525"/>
           </a:xfrm>
           <a:prstGeom prst="rect">
@@ -3228,7 +3228,7 @@
         </p:nvSpPr>
         <p:spPr>
           <a:xfrm>
-            <a:off x="857250" y="21768792"/>
+            <a:off x="857250" y="21479173"/>
             <a:ext cx="14478000" cy="9525"/>
           </a:xfrm>
           <a:prstGeom prst="rect">
@@ -3308,7 +3308,7 @@
         <p:spPr>
           <a:xfrm>
             <a:off x="857250" y="11449050"/>
-            <a:ext cx="23545800" cy="1428750"/>
+            <a:ext cx="23545800" cy="1139130"/>
           </a:xfrm>
           <a:prstGeom prst="rect">
             <a:avLst/>
@@ -3319,7 +3319,11 @@
           <a:bodyPr wrap="none" anchor="t" lIns="0" rIns="0" tIns="0" bIns="0"/>
           <a:lstStyle/>
           <a:p>
-            <a:pPr algn="l"/>
+            <a:pPr algn="l">
+              <a:lnSpc>
+                <a:spcPct val="92000"/>
+              </a:lnSpc>
+            </a:pPr>
             <a:r>
               <a:rPr sz="9750" i="1" b="0">
                 <a:solidFill>
@@ -3342,7 +3346,7 @@
         </p:nvSpPr>
         <p:spPr>
           <a:xfrm>
-            <a:off x="857250" y="13011150"/>
+            <a:off x="857250" y="12721530"/>
             <a:ext cx="23545800" cy="247650"/>
           </a:xfrm>
           <a:prstGeom prst="rect">
@@ -3377,7 +3381,7 @@
         </p:nvSpPr>
         <p:spPr>
           <a:xfrm>
-            <a:off x="857250" y="13896975"/>
+            <a:off x="857250" y="13607355"/>
             <a:ext cx="6172200" cy="104775"/>
           </a:xfrm>
           <a:prstGeom prst="rect">
@@ -3412,8 +3416,8 @@
         </p:nvSpPr>
         <p:spPr>
           <a:xfrm>
-            <a:off x="857250" y="14077950"/>
-            <a:ext cx="6172200" cy="257175"/>
+            <a:off x="857250" y="13788330"/>
+            <a:ext cx="6172200" cy="210294"/>
           </a:xfrm>
           <a:prstGeom prst="rect">
             <a:avLst/>
@@ -3424,7 +3428,11 @@
           <a:bodyPr wrap="none" anchor="t" lIns="0" rIns="0" tIns="0" bIns="0"/>
           <a:lstStyle/>
           <a:p>
-            <a:pPr algn="l"/>
+            <a:pPr algn="l">
+              <a:lnSpc>
+                <a:spcPct val="92000"/>
+              </a:lnSpc>
+            </a:pPr>
             <a:r>
               <a:rPr sz="1800" i="1" b="0">
                 <a:solidFill>
@@ -3447,7 +3455,7 @@
         </p:nvSpPr>
         <p:spPr>
           <a:xfrm>
-            <a:off x="4476750" y="13896975"/>
+            <a:off x="4476750" y="13607355"/>
             <a:ext cx="6172200" cy="104775"/>
           </a:xfrm>
           <a:prstGeom prst="rect">
@@ -3482,8 +3490,8 @@
         </p:nvSpPr>
         <p:spPr>
           <a:xfrm>
-            <a:off x="4476750" y="14077950"/>
-            <a:ext cx="6172200" cy="257175"/>
+            <a:off x="4476750" y="13788330"/>
+            <a:ext cx="6172200" cy="210294"/>
           </a:xfrm>
           <a:prstGeom prst="rect">
             <a:avLst/>
@@ -3494,7 +3502,11 @@
           <a:bodyPr wrap="none" anchor="t" lIns="0" rIns="0" tIns="0" bIns="0"/>
           <a:lstStyle/>
           <a:p>
-            <a:pPr algn="l"/>
+            <a:pPr algn="l">
+              <a:lnSpc>
+                <a:spcPct val="92000"/>
+              </a:lnSpc>
+            </a:pPr>
             <a:r>
               <a:rPr sz="1800" i="1" b="0">
                 <a:solidFill>
@@ -3517,7 +3529,7 @@
         </p:nvSpPr>
         <p:spPr>
           <a:xfrm>
-            <a:off x="8096250" y="13896975"/>
+            <a:off x="8096250" y="13607355"/>
             <a:ext cx="6172200" cy="104775"/>
           </a:xfrm>
           <a:prstGeom prst="rect">
@@ -3552,8 +3564,8 @@
         </p:nvSpPr>
         <p:spPr>
           <a:xfrm>
-            <a:off x="8096250" y="14077950"/>
-            <a:ext cx="6172200" cy="257175"/>
+            <a:off x="8096250" y="13788330"/>
+            <a:ext cx="6172200" cy="210294"/>
           </a:xfrm>
           <a:prstGeom prst="rect">
             <a:avLst/>
@@ -3564,7 +3576,11 @@
           <a:bodyPr wrap="none" anchor="t" lIns="0" rIns="0" tIns="0" bIns="0"/>
           <a:lstStyle/>
           <a:p>
-            <a:pPr algn="l"/>
+            <a:pPr algn="l">
+              <a:lnSpc>
+                <a:spcPct val="92000"/>
+              </a:lnSpc>
+            </a:pPr>
             <a:r>
               <a:rPr sz="1800" i="1" b="0">
                 <a:solidFill>
@@ -3587,7 +3603,7 @@
         </p:nvSpPr>
         <p:spPr>
           <a:xfrm>
-            <a:off x="11715750" y="13896975"/>
+            <a:off x="11715750" y="13607355"/>
             <a:ext cx="6172200" cy="104775"/>
           </a:xfrm>
           <a:prstGeom prst="rect">
@@ -3622,8 +3638,8 @@
         </p:nvSpPr>
         <p:spPr>
           <a:xfrm>
-            <a:off x="11715750" y="14077950"/>
-            <a:ext cx="6172200" cy="257175"/>
+            <a:off x="11715750" y="13788330"/>
+            <a:ext cx="6172200" cy="210294"/>
           </a:xfrm>
           <a:prstGeom prst="rect">
             <a:avLst/>
@@ -3634,7 +3650,11 @@
           <a:bodyPr wrap="none" anchor="t" lIns="0" rIns="0" tIns="0" bIns="0"/>
           <a:lstStyle/>
           <a:p>
-            <a:pPr algn="l"/>
+            <a:pPr algn="l">
+              <a:lnSpc>
+                <a:spcPct val="92000"/>
+              </a:lnSpc>
+            </a:pPr>
             <a:r>
               <a:rPr sz="1800" i="1" b="0">
                 <a:solidFill>
@@ -3657,7 +3677,7 @@
         </p:nvSpPr>
         <p:spPr>
           <a:xfrm>
-            <a:off x="857250" y="14916150"/>
+            <a:off x="857250" y="14579650"/>
             <a:ext cx="20193000" cy="270867"/>
           </a:xfrm>
           <a:prstGeom prst="rect">
@@ -3696,8 +3716,8 @@
         </p:nvSpPr>
         <p:spPr>
           <a:xfrm>
-            <a:off x="857250" y="22006917"/>
-            <a:ext cx="2645807" cy="257175"/>
+            <a:off x="857250" y="21717298"/>
+            <a:ext cx="2645807" cy="210294"/>
           </a:xfrm>
           <a:prstGeom prst="rect">
             <a:avLst/>
@@ -3708,7 +3728,11 @@
           <a:bodyPr wrap="none" anchor="t" lIns="0" rIns="0" tIns="0" bIns="0"/>
           <a:lstStyle/>
           <a:p>
-            <a:pPr algn="l"/>
+            <a:pPr algn="l">
+              <a:lnSpc>
+                <a:spcPct val="92000"/>
+              </a:lnSpc>
+            </a:pPr>
             <a:r>
               <a:rPr sz="1800" i="1" b="0">
                 <a:solidFill>
@@ -3731,7 +3755,7 @@
         </p:nvSpPr>
         <p:spPr>
           <a:xfrm>
-            <a:off x="857250" y="22321242"/>
+            <a:off x="857250" y="21984742"/>
             <a:ext cx="2645807" cy="104775"/>
           </a:xfrm>
           <a:prstGeom prst="rect">
@@ -3766,7 +3790,7 @@
         </p:nvSpPr>
         <p:spPr>
           <a:xfrm>
-            <a:off x="10252472" y="22283142"/>
+            <a:off x="10252472" y="21946642"/>
             <a:ext cx="8513445" cy="142875"/>
           </a:xfrm>
           <a:prstGeom prst="rect">
